--- a/AI_Chat_Architecture_BangkokBank.pptx
+++ b/AI_Chat_Architecture_BangkokBank.pptx
@@ -3420,7 +3420,6 @@
           <a:ln>
             <a:noFill/>
           </a:ln>
-          <a:effectLst/>
           <a:effectLst>
             <a:outerShdw blurRad="60000" dist="30000" dir="5400000" rotWithShape="0">
               <a:srgbClr val="1A2230">
@@ -3528,7 +3527,6 @@
           <a:ln>
             <a:noFill/>
           </a:ln>
-          <a:effectLst/>
           <a:effectLst>
             <a:outerShdw blurRad="60000" dist="30000" dir="5400000" rotWithShape="0">
               <a:srgbClr val="1A2230">
@@ -3636,7 +3634,6 @@
           <a:ln>
             <a:noFill/>
           </a:ln>
-          <a:effectLst/>
           <a:effectLst>
             <a:outerShdw blurRad="60000" dist="30000" dir="5400000" rotWithShape="0">
               <a:srgbClr val="1A2230">
@@ -3744,7 +3741,6 @@
           <a:ln>
             <a:noFill/>
           </a:ln>
-          <a:effectLst/>
           <a:effectLst>
             <a:outerShdw blurRad="60000" dist="30000" dir="5400000" rotWithShape="0">
               <a:srgbClr val="1A2230">
@@ -3812,7 +3808,6 @@
           <a:ln>
             <a:noFill/>
           </a:ln>
-          <a:effectLst/>
           <a:effectLst>
             <a:outerShdw blurRad="60000" dist="30000" dir="5400000" rotWithShape="0">
               <a:srgbClr val="1A2230">
@@ -4441,7 +4436,6 @@
           <a:ln>
             <a:noFill/>
           </a:ln>
-          <a:effectLst/>
           <a:effectLst>
             <a:outerShdw blurRad="60000" dist="30000" dir="5400000" rotWithShape="0">
               <a:srgbClr val="1A2230">
@@ -4553,7 +4547,6 @@
               <a:srgbClr val="1A9C9C"/>
             </a:solidFill>
           </a:ln>
-          <a:effectLst/>
           <a:effectLst>
             <a:outerShdw blurRad="60000" dist="30000" dir="5400000" rotWithShape="0">
               <a:srgbClr val="1A2230">
@@ -4887,7 +4880,6 @@
           <a:ln>
             <a:noFill/>
           </a:ln>
-          <a:effectLst/>
           <a:effectLst>
             <a:outerShdw blurRad="60000" dist="30000" dir="5400000" rotWithShape="0">
               <a:srgbClr val="1A2230">
@@ -5188,7 +5180,6 @@
           <a:ln>
             <a:noFill/>
           </a:ln>
-          <a:effectLst/>
           <a:effectLst>
             <a:outerShdw blurRad="60000" dist="30000" dir="5400000" rotWithShape="0">
               <a:srgbClr val="1A2230">
@@ -5296,7 +5287,6 @@
           <a:ln>
             <a:noFill/>
           </a:ln>
-          <a:effectLst/>
           <a:effectLst>
             <a:outerShdw blurRad="60000" dist="30000" dir="5400000" rotWithShape="0">
               <a:srgbClr val="1A2230">
@@ -6489,7 +6479,6 @@
           <a:ln>
             <a:noFill/>
           </a:ln>
-          <a:effectLst/>
           <a:effectLst>
             <a:outerShdw blurRad="60000" dist="30000" dir="5400000" rotWithShape="0">
               <a:srgbClr val="1A2230">
@@ -6668,7 +6657,6 @@
           <a:ln>
             <a:noFill/>
           </a:ln>
-          <a:effectLst/>
           <a:effectLst>
             <a:outerShdw blurRad="60000" dist="30000" dir="5400000" rotWithShape="0">
               <a:srgbClr val="1A2230">
@@ -6847,7 +6835,6 @@
           <a:ln>
             <a:noFill/>
           </a:ln>
-          <a:effectLst/>
           <a:effectLst>
             <a:outerShdw blurRad="60000" dist="30000" dir="5400000" rotWithShape="0">
               <a:srgbClr val="1A2230">
@@ -7026,7 +7013,6 @@
           <a:ln>
             <a:noFill/>
           </a:ln>
-          <a:effectLst/>
           <a:effectLst>
             <a:outerShdw blurRad="60000" dist="30000" dir="5400000" rotWithShape="0">
               <a:srgbClr val="1A2230">
@@ -7205,7 +7191,6 @@
           <a:ln>
             <a:noFill/>
           </a:ln>
-          <a:effectLst/>
           <a:effectLst>
             <a:outerShdw blurRad="60000" dist="30000" dir="5400000" rotWithShape="0">
               <a:srgbClr val="1A2230">
@@ -7384,7 +7369,6 @@
           <a:ln>
             <a:noFill/>
           </a:ln>
-          <a:effectLst/>
           <a:effectLst>
             <a:outerShdw blurRad="60000" dist="30000" dir="5400000" rotWithShape="0">
               <a:srgbClr val="1A2230">
@@ -7563,7 +7547,6 @@
           <a:ln>
             <a:noFill/>
           </a:ln>
-          <a:effectLst/>
           <a:effectLst>
             <a:outerShdw blurRad="60000" dist="30000" dir="5400000" rotWithShape="0">
               <a:srgbClr val="1A2230">
@@ -7742,7 +7725,6 @@
           <a:ln>
             <a:noFill/>
           </a:ln>
-          <a:effectLst/>
           <a:effectLst>
             <a:outerShdw blurRad="60000" dist="30000" dir="5400000" rotWithShape="0">
               <a:srgbClr val="1A2230">
@@ -7921,7 +7903,6 @@
           <a:ln>
             <a:noFill/>
           </a:ln>
-          <a:effectLst/>
           <a:effectLst>
             <a:outerShdw blurRad="60000" dist="30000" dir="5400000" rotWithShape="0">
               <a:srgbClr val="1A2230">
@@ -8100,7 +8081,6 @@
           <a:ln>
             <a:noFill/>
           </a:ln>
-          <a:effectLst/>
           <a:effectLst>
             <a:outerShdw blurRad="60000" dist="30000" dir="5400000" rotWithShape="0">
               <a:srgbClr val="1A2230">
@@ -8279,7 +8259,6 @@
           <a:ln>
             <a:noFill/>
           </a:ln>
-          <a:effectLst/>
           <a:effectLst>
             <a:outerShdw blurRad="60000" dist="30000" dir="5400000" rotWithShape="0">
               <a:srgbClr val="1A2230">
@@ -8896,7 +8875,6 @@
               <a:srgbClr val="C0393D"/>
             </a:solidFill>
           </a:ln>
-          <a:effectLst/>
           <a:effectLst>
             <a:outerShdw blurRad="60000" dist="30000" dir="5400000" rotWithShape="0">
               <a:srgbClr val="1A2230">
@@ -9570,7 +9548,6 @@
               <a:srgbClr val="C9A227"/>
             </a:solidFill>
           </a:ln>
-          <a:effectLst/>
           <a:effectLst>
             <a:outerShdw blurRad="60000" dist="30000" dir="5400000" rotWithShape="0">
               <a:srgbClr val="1A2230">
@@ -10244,7 +10221,6 @@
               <a:srgbClr val="2E9E5B"/>
             </a:solidFill>
           </a:ln>
-          <a:effectLst/>
           <a:effectLst>
             <a:outerShdw blurRad="60000" dist="30000" dir="5400000" rotWithShape="0">
               <a:srgbClr val="1A2230">
@@ -11292,7 +11268,6 @@
           <a:ln>
             <a:noFill/>
           </a:ln>
-          <a:effectLst/>
           <a:effectLst>
             <a:outerShdw blurRad="60000" dist="30000" dir="5400000" rotWithShape="0">
               <a:srgbClr val="1A2230">
@@ -11400,7 +11375,6 @@
           <a:ln>
             <a:noFill/>
           </a:ln>
-          <a:effectLst/>
           <a:effectLst>
             <a:outerShdw blurRad="60000" dist="30000" dir="5400000" rotWithShape="0">
               <a:srgbClr val="1A2230">
@@ -11508,7 +11482,6 @@
           <a:ln>
             <a:noFill/>
           </a:ln>
-          <a:effectLst/>
           <a:effectLst>
             <a:outerShdw blurRad="60000" dist="30000" dir="5400000" rotWithShape="0">
               <a:srgbClr val="1A2230">
@@ -11616,7 +11589,6 @@
           <a:ln>
             <a:noFill/>
           </a:ln>
-          <a:effectLst/>
           <a:effectLst>
             <a:outerShdw blurRad="60000" dist="30000" dir="5400000" rotWithShape="0">
               <a:srgbClr val="1A2230">
@@ -11684,7 +11656,6 @@
           <a:ln>
             <a:noFill/>
           </a:ln>
-          <a:effectLst/>
           <a:effectLst>
             <a:outerShdw blurRad="60000" dist="30000" dir="5400000" rotWithShape="0">
               <a:srgbClr val="1A2230">
